--- a/Presentation.pptx
+++ b/Presentation.pptx
@@ -316,7 +316,7 @@
     </p:spTree>
     <p:extLst>
       <p:ext uri="{BB962C8B-B14F-4D97-AF65-F5344CB8AC3E}">
-        <p14:creationId xmlns="" xmlns:p14="http://schemas.microsoft.com/office/powerpoint/2010/main" val="1024086991"/>
+        <p14:creationId xmlns:p14="http://schemas.microsoft.com/office/powerpoint/2010/main" xmlns="" val="1024086991"/>
       </p:ext>
     </p:extLst>
   </p:cSld>
@@ -401,7 +401,7 @@
     </p:spTree>
     <p:extLst>
       <p:ext uri="{BB962C8B-B14F-4D97-AF65-F5344CB8AC3E}">
-        <p14:creationId xmlns="" xmlns:p14="http://schemas.microsoft.com/office/powerpoint/2010/main" val="1024086991"/>
+        <p14:creationId xmlns:p14="http://schemas.microsoft.com/office/powerpoint/2010/main" xmlns="" val="1024086991"/>
       </p:ext>
     </p:extLst>
   </p:cSld>
@@ -486,7 +486,7 @@
     </p:spTree>
     <p:extLst>
       <p:ext uri="{BB962C8B-B14F-4D97-AF65-F5344CB8AC3E}">
-        <p14:creationId xmlns="" xmlns:p14="http://schemas.microsoft.com/office/powerpoint/2010/main" val="1024086991"/>
+        <p14:creationId xmlns:p14="http://schemas.microsoft.com/office/powerpoint/2010/main" xmlns="" val="1024086991"/>
       </p:ext>
     </p:extLst>
   </p:cSld>
@@ -571,7 +571,7 @@
     </p:spTree>
     <p:extLst>
       <p:ext uri="{BB962C8B-B14F-4D97-AF65-F5344CB8AC3E}">
-        <p14:creationId xmlns="" xmlns:p14="http://schemas.microsoft.com/office/powerpoint/2010/main" val="1024086991"/>
+        <p14:creationId xmlns:p14="http://schemas.microsoft.com/office/powerpoint/2010/main" xmlns="" val="1024086991"/>
       </p:ext>
     </p:extLst>
   </p:cSld>
@@ -656,7 +656,7 @@
     </p:spTree>
     <p:extLst>
       <p:ext uri="{BB962C8B-B14F-4D97-AF65-F5344CB8AC3E}">
-        <p14:creationId xmlns="" xmlns:p14="http://schemas.microsoft.com/office/powerpoint/2010/main" val="1024086991"/>
+        <p14:creationId xmlns:p14="http://schemas.microsoft.com/office/powerpoint/2010/main" xmlns="" val="1024086991"/>
       </p:ext>
     </p:extLst>
   </p:cSld>
@@ -741,7 +741,7 @@
     </p:spTree>
     <p:extLst>
       <p:ext uri="{BB962C8B-B14F-4D97-AF65-F5344CB8AC3E}">
-        <p14:creationId xmlns="" xmlns:p14="http://schemas.microsoft.com/office/powerpoint/2010/main" val="1024086991"/>
+        <p14:creationId xmlns:p14="http://schemas.microsoft.com/office/powerpoint/2010/main" xmlns="" val="1024086991"/>
       </p:ext>
     </p:extLst>
   </p:cSld>
@@ -826,7 +826,7 @@
     </p:spTree>
     <p:extLst>
       <p:ext uri="{BB962C8B-B14F-4D97-AF65-F5344CB8AC3E}">
-        <p14:creationId xmlns="" xmlns:p14="http://schemas.microsoft.com/office/powerpoint/2010/main" val="1024086991"/>
+        <p14:creationId xmlns:p14="http://schemas.microsoft.com/office/powerpoint/2010/main" xmlns="" val="1024086991"/>
       </p:ext>
     </p:extLst>
   </p:cSld>
@@ -911,7 +911,7 @@
     </p:spTree>
     <p:extLst>
       <p:ext uri="{BB962C8B-B14F-4D97-AF65-F5344CB8AC3E}">
-        <p14:creationId xmlns="" xmlns:p14="http://schemas.microsoft.com/office/powerpoint/2010/main" val="1024086991"/>
+        <p14:creationId xmlns:p14="http://schemas.microsoft.com/office/powerpoint/2010/main" xmlns="" val="1024086991"/>
       </p:ext>
     </p:extLst>
   </p:cSld>
@@ -996,7 +996,7 @@
     </p:spTree>
     <p:extLst>
       <p:ext uri="{BB962C8B-B14F-4D97-AF65-F5344CB8AC3E}">
-        <p14:creationId xmlns="" xmlns:p14="http://schemas.microsoft.com/office/powerpoint/2010/main" val="1024086991"/>
+        <p14:creationId xmlns:p14="http://schemas.microsoft.com/office/powerpoint/2010/main" xmlns="" val="1024086991"/>
       </p:ext>
     </p:extLst>
   </p:cSld>
@@ -1081,7 +1081,7 @@
     </p:spTree>
     <p:extLst>
       <p:ext uri="{BB962C8B-B14F-4D97-AF65-F5344CB8AC3E}">
-        <p14:creationId xmlns="" xmlns:p14="http://schemas.microsoft.com/office/powerpoint/2010/main" val="1024086991"/>
+        <p14:creationId xmlns:p14="http://schemas.microsoft.com/office/powerpoint/2010/main" xmlns="" val="1024086991"/>
       </p:ext>
     </p:extLst>
   </p:cSld>
@@ -1166,7 +1166,7 @@
     </p:spTree>
     <p:extLst>
       <p:ext uri="{BB962C8B-B14F-4D97-AF65-F5344CB8AC3E}">
-        <p14:creationId xmlns="" xmlns:p14="http://schemas.microsoft.com/office/powerpoint/2010/main" val="1024086991"/>
+        <p14:creationId xmlns:p14="http://schemas.microsoft.com/office/powerpoint/2010/main" xmlns="" val="1024086991"/>
       </p:ext>
     </p:extLst>
   </p:cSld>
@@ -1622,7 +1622,7 @@
               <a:buNone/>
             </a:pPr>
             <a:r>
-              <a:rPr lang="en-US" sz="8000" b="1" dirty="0">
+              <a:rPr lang="en-US" sz="8000" b="1" smtClean="0">
                 <a:solidFill>
                   <a:srgbClr val="FFFFFF"/>
                 </a:solidFill>
@@ -1630,7 +1630,7 @@
                 <a:ea typeface="Calibri" pitchFamily="34" charset="-122"/>
                 <a:cs typeface="Calibri" pitchFamily="34" charset="-120"/>
               </a:rPr>
-              <a:t>NAVISENCE</a:t>
+              <a:t>NAVISENSE</a:t>
             </a:r>
             <a:endParaRPr lang="en-US" sz="8000" dirty="0"/>
           </a:p>
@@ -15984,7 +15984,7 @@
   <a:extraClrSchemeLst/>
   <a:extLst>
     <a:ext uri="{05A4C25C-085E-4340-85A3-A5531E510DB2}">
-      <thm15:themeFamily xmlns="" xmlns:thm15="http://schemas.microsoft.com/office/thememl/2012/main" name="Office Theme" id="{62F939B6-93AF-4DB8-9C6B-D6C7DFDC589F}" vid="{4A3C46E8-61CC-4603-A589-7422A47A8E4A}"/>
+      <thm15:themeFamily xmlns:thm15="http://schemas.microsoft.com/office/thememl/2012/main" xmlns="" name="Office Theme" id="{62F939B6-93AF-4DB8-9C6B-D6C7DFDC589F}" vid="{4A3C46E8-61CC-4603-A589-7422A47A8E4A}"/>
     </a:ext>
   </a:extLst>
 </a:theme>

--- a/Presentation.pptx
+++ b/Presentation.pptx
@@ -316,7 +316,7 @@
     </p:spTree>
     <p:extLst>
       <p:ext uri="{BB962C8B-B14F-4D97-AF65-F5344CB8AC3E}">
-        <p14:creationId xmlns:p14="http://schemas.microsoft.com/office/powerpoint/2010/main" xmlns="" val="1024086991"/>
+        <p14:creationId xmlns="" xmlns:p14="http://schemas.microsoft.com/office/powerpoint/2010/main" val="1024086991"/>
       </p:ext>
     </p:extLst>
   </p:cSld>
@@ -401,7 +401,7 @@
     </p:spTree>
     <p:extLst>
       <p:ext uri="{BB962C8B-B14F-4D97-AF65-F5344CB8AC3E}">
-        <p14:creationId xmlns:p14="http://schemas.microsoft.com/office/powerpoint/2010/main" xmlns="" val="1024086991"/>
+        <p14:creationId xmlns="" xmlns:p14="http://schemas.microsoft.com/office/powerpoint/2010/main" val="1024086991"/>
       </p:ext>
     </p:extLst>
   </p:cSld>
@@ -486,7 +486,7 @@
     </p:spTree>
     <p:extLst>
       <p:ext uri="{BB962C8B-B14F-4D97-AF65-F5344CB8AC3E}">
-        <p14:creationId xmlns:p14="http://schemas.microsoft.com/office/powerpoint/2010/main" xmlns="" val="1024086991"/>
+        <p14:creationId xmlns="" xmlns:p14="http://schemas.microsoft.com/office/powerpoint/2010/main" val="1024086991"/>
       </p:ext>
     </p:extLst>
   </p:cSld>
@@ -571,7 +571,7 @@
     </p:spTree>
     <p:extLst>
       <p:ext uri="{BB962C8B-B14F-4D97-AF65-F5344CB8AC3E}">
-        <p14:creationId xmlns:p14="http://schemas.microsoft.com/office/powerpoint/2010/main" xmlns="" val="1024086991"/>
+        <p14:creationId xmlns="" xmlns:p14="http://schemas.microsoft.com/office/powerpoint/2010/main" val="1024086991"/>
       </p:ext>
     </p:extLst>
   </p:cSld>
@@ -656,7 +656,7 @@
     </p:spTree>
     <p:extLst>
       <p:ext uri="{BB962C8B-B14F-4D97-AF65-F5344CB8AC3E}">
-        <p14:creationId xmlns:p14="http://schemas.microsoft.com/office/powerpoint/2010/main" xmlns="" val="1024086991"/>
+        <p14:creationId xmlns="" xmlns:p14="http://schemas.microsoft.com/office/powerpoint/2010/main" val="1024086991"/>
       </p:ext>
     </p:extLst>
   </p:cSld>
@@ -741,7 +741,7 @@
     </p:spTree>
     <p:extLst>
       <p:ext uri="{BB962C8B-B14F-4D97-AF65-F5344CB8AC3E}">
-        <p14:creationId xmlns:p14="http://schemas.microsoft.com/office/powerpoint/2010/main" xmlns="" val="1024086991"/>
+        <p14:creationId xmlns="" xmlns:p14="http://schemas.microsoft.com/office/powerpoint/2010/main" val="1024086991"/>
       </p:ext>
     </p:extLst>
   </p:cSld>
@@ -826,7 +826,7 @@
     </p:spTree>
     <p:extLst>
       <p:ext uri="{BB962C8B-B14F-4D97-AF65-F5344CB8AC3E}">
-        <p14:creationId xmlns:p14="http://schemas.microsoft.com/office/powerpoint/2010/main" xmlns="" val="1024086991"/>
+        <p14:creationId xmlns="" xmlns:p14="http://schemas.microsoft.com/office/powerpoint/2010/main" val="1024086991"/>
       </p:ext>
     </p:extLst>
   </p:cSld>
@@ -911,7 +911,7 @@
     </p:spTree>
     <p:extLst>
       <p:ext uri="{BB962C8B-B14F-4D97-AF65-F5344CB8AC3E}">
-        <p14:creationId xmlns:p14="http://schemas.microsoft.com/office/powerpoint/2010/main" xmlns="" val="1024086991"/>
+        <p14:creationId xmlns="" xmlns:p14="http://schemas.microsoft.com/office/powerpoint/2010/main" val="1024086991"/>
       </p:ext>
     </p:extLst>
   </p:cSld>
@@ -996,7 +996,7 @@
     </p:spTree>
     <p:extLst>
       <p:ext uri="{BB962C8B-B14F-4D97-AF65-F5344CB8AC3E}">
-        <p14:creationId xmlns:p14="http://schemas.microsoft.com/office/powerpoint/2010/main" xmlns="" val="1024086991"/>
+        <p14:creationId xmlns="" xmlns:p14="http://schemas.microsoft.com/office/powerpoint/2010/main" val="1024086991"/>
       </p:ext>
     </p:extLst>
   </p:cSld>
@@ -1081,7 +1081,7 @@
     </p:spTree>
     <p:extLst>
       <p:ext uri="{BB962C8B-B14F-4D97-AF65-F5344CB8AC3E}">
-        <p14:creationId xmlns:p14="http://schemas.microsoft.com/office/powerpoint/2010/main" xmlns="" val="1024086991"/>
+        <p14:creationId xmlns="" xmlns:p14="http://schemas.microsoft.com/office/powerpoint/2010/main" val="1024086991"/>
       </p:ext>
     </p:extLst>
   </p:cSld>
@@ -1166,7 +1166,7 @@
     </p:spTree>
     <p:extLst>
       <p:ext uri="{BB962C8B-B14F-4D97-AF65-F5344CB8AC3E}">
-        <p14:creationId xmlns:p14="http://schemas.microsoft.com/office/powerpoint/2010/main" xmlns="" val="1024086991"/>
+        <p14:creationId xmlns="" xmlns:p14="http://schemas.microsoft.com/office/powerpoint/2010/main" val="1024086991"/>
       </p:ext>
     </p:extLst>
   </p:cSld>
@@ -2924,13 +2924,13 @@
       </p:sp>
       <p:sp>
         <p:nvSpPr>
-          <p:cNvPr id="16" name="Shape 14"/>
-          <p:cNvSpPr/>
-          <p:nvPr/>
-        </p:nvSpPr>
-        <p:spPr>
-          <a:xfrm>
-            <a:off x="548640" y="4023360"/>
+          <p:cNvPr id="21" name="Shape 19"/>
+          <p:cNvSpPr/>
+          <p:nvPr/>
+        </p:nvSpPr>
+        <p:spPr>
+          <a:xfrm>
+            <a:off x="548640" y="4160520"/>
             <a:ext cx="5532120" cy="2057400"/>
           </a:xfrm>
           <a:prstGeom prst="rect">
@@ -2949,13 +2949,13 @@
       </p:sp>
       <p:sp>
         <p:nvSpPr>
-          <p:cNvPr id="17" name="Shape 15"/>
-          <p:cNvSpPr/>
-          <p:nvPr/>
-        </p:nvSpPr>
-        <p:spPr>
-          <a:xfrm>
-            <a:off x="548640" y="4023360"/>
+          <p:cNvPr id="22" name="Shape 20"/>
+          <p:cNvSpPr/>
+          <p:nvPr/>
+        </p:nvSpPr>
+        <p:spPr>
+          <a:xfrm>
+            <a:off x="548640" y="4160520"/>
             <a:ext cx="91440" cy="2057400"/>
           </a:xfrm>
           <a:prstGeom prst="rect">
@@ -2974,13 +2974,13 @@
       </p:sp>
       <p:sp>
         <p:nvSpPr>
-          <p:cNvPr id="18" name="Text 16"/>
-          <p:cNvSpPr/>
-          <p:nvPr/>
-        </p:nvSpPr>
-        <p:spPr>
-          <a:xfrm>
-            <a:off x="822960" y="4160520"/>
+          <p:cNvPr id="23" name="Text 21"/>
+          <p:cNvSpPr/>
+          <p:nvPr/>
+        </p:nvSpPr>
+        <p:spPr>
+          <a:xfrm>
+            <a:off x="822960" y="4297680"/>
             <a:ext cx="5074920" cy="411480"/>
           </a:xfrm>
           <a:prstGeom prst="rect">
@@ -3005,7 +3005,7 @@
                 <a:ea typeface="Calibri" pitchFamily="34" charset="-122"/>
                 <a:cs typeface="Calibri" pitchFamily="34" charset="-120"/>
               </a:rPr>
-              <a:t>Garbage Collection Pressure</a:t>
+              <a:t>Detection Broke on Rotation</a:t>
             </a:r>
             <a:endParaRPr lang="en-US" sz="1700" dirty="0"/>
           </a:p>
@@ -3013,13 +3013,13 @@
       </p:sp>
       <p:sp>
         <p:nvSpPr>
-          <p:cNvPr id="19" name="Text 17"/>
-          <p:cNvSpPr/>
-          <p:nvPr/>
-        </p:nvSpPr>
-        <p:spPr>
-          <a:xfrm>
-            <a:off x="822960" y="4663440"/>
+          <p:cNvPr id="24" name="Text 22"/>
+          <p:cNvSpPr/>
+          <p:nvPr/>
+        </p:nvSpPr>
+        <p:spPr>
+          <a:xfrm>
+            <a:off x="822960" y="4800600"/>
             <a:ext cx="5074920" cy="640080"/>
           </a:xfrm>
           <a:prstGeom prst="rect">
@@ -3055,7 +3055,7 @@
                 <a:ea typeface="Calibri" pitchFamily="34" charset="-122"/>
                 <a:cs typeface="Calibri" pitchFamily="34" charset="-120"/>
               </a:rPr>
-              <a:t>Nested lists allocated ~170k Lists per frame, causing GC spikes.</a:t>
+              <a:t>Phone tilted physically — model saw upright frame of sideways world.</a:t>
             </a:r>
             <a:endParaRPr lang="en-US" sz="1000" dirty="0"/>
           </a:p>
@@ -3063,202 +3063,13 @@
       </p:sp>
       <p:sp>
         <p:nvSpPr>
-          <p:cNvPr id="20" name="Text 18"/>
-          <p:cNvSpPr/>
-          <p:nvPr/>
-        </p:nvSpPr>
-        <p:spPr>
-          <a:xfrm>
-            <a:off x="822960" y="5349240"/>
-            <a:ext cx="5074920" cy="640080"/>
-          </a:xfrm>
-          <a:prstGeom prst="rect">
-            <a:avLst/>
-          </a:prstGeom>
-          <a:noFill/>
-          <a:ln/>
-        </p:spPr>
-        <p:txBody>
-          <a:bodyPr wrap="square" lIns="0" tIns="0" rIns="0" bIns="0" rtlCol="0" anchor="ctr"/>
-          <a:lstStyle/>
-          <a:p>
-            <a:pPr marL="0" indent="0">
-              <a:buNone/>
-            </a:pPr>
-            <a:r>
-              <a:rPr lang="en-US" sz="1000" b="1" kern="0" spc="200" dirty="0">
-                <a:solidFill>
-                  <a:srgbClr val="00D4A8"/>
-                </a:solidFill>
-                <a:latin typeface="Calibri" pitchFamily="34" charset="0"/>
-                <a:ea typeface="Calibri" pitchFamily="34" charset="-122"/>
-                <a:cs typeface="Calibri" pitchFamily="34" charset="-120"/>
-              </a:rPr>
-              <a:t>FIX  </a:t>
-            </a:r>
-            <a:r>
-              <a:rPr lang="en-US" sz="1200" dirty="0">
-                <a:solidFill>
-                  <a:srgbClr val="0B1F3A"/>
-                </a:solidFill>
-                <a:latin typeface="Calibri" pitchFamily="34" charset="0"/>
-                <a:ea typeface="Calibri" pitchFamily="34" charset="-122"/>
-                <a:cs typeface="Calibri" pitchFamily="34" charset="-120"/>
-              </a:rPr>
-              <a:t>Flat Float32List input tensor + pre-allocated output buffer.</a:t>
-            </a:r>
-            <a:endParaRPr lang="en-US" sz="1000" dirty="0"/>
-          </a:p>
-        </p:txBody>
-      </p:sp>
-      <p:sp>
-        <p:nvSpPr>
-          <p:cNvPr id="21" name="Shape 19"/>
-          <p:cNvSpPr/>
-          <p:nvPr/>
-        </p:nvSpPr>
-        <p:spPr>
-          <a:xfrm>
-            <a:off x="6217920" y="4023360"/>
-            <a:ext cx="5532120" cy="2057400"/>
-          </a:xfrm>
-          <a:prstGeom prst="rect">
-            <a:avLst/>
-          </a:prstGeom>
-          <a:solidFill>
-            <a:srgbClr val="F7F9FC"/>
-          </a:solidFill>
-          <a:ln w="12700">
-            <a:solidFill>
-              <a:srgbClr val="E5E9F0"/>
-            </a:solidFill>
-            <a:prstDash val="solid"/>
-          </a:ln>
-        </p:spPr>
-      </p:sp>
-      <p:sp>
-        <p:nvSpPr>
-          <p:cNvPr id="22" name="Shape 20"/>
-          <p:cNvSpPr/>
-          <p:nvPr/>
-        </p:nvSpPr>
-        <p:spPr>
-          <a:xfrm>
-            <a:off x="6217920" y="4023360"/>
-            <a:ext cx="91440" cy="2057400"/>
-          </a:xfrm>
-          <a:prstGeom prst="rect">
-            <a:avLst/>
-          </a:prstGeom>
-          <a:solidFill>
-            <a:srgbClr val="00D4A8"/>
-          </a:solidFill>
-          <a:ln w="12700">
-            <a:solidFill>
-              <a:srgbClr val="00D4A8"/>
-            </a:solidFill>
-            <a:prstDash val="solid"/>
-          </a:ln>
-        </p:spPr>
-      </p:sp>
-      <p:sp>
-        <p:nvSpPr>
-          <p:cNvPr id="23" name="Text 21"/>
-          <p:cNvSpPr/>
-          <p:nvPr/>
-        </p:nvSpPr>
-        <p:spPr>
-          <a:xfrm>
-            <a:off x="6492240" y="4160520"/>
-            <a:ext cx="5074920" cy="411480"/>
-          </a:xfrm>
-          <a:prstGeom prst="rect">
-            <a:avLst/>
-          </a:prstGeom>
-          <a:noFill/>
-          <a:ln/>
-        </p:spPr>
-        <p:txBody>
-          <a:bodyPr wrap="square" lIns="0" tIns="0" rIns="0" bIns="0" rtlCol="0" anchor="ctr"/>
-          <a:lstStyle/>
-          <a:p>
-            <a:pPr marL="0" indent="0">
-              <a:buNone/>
-            </a:pPr>
-            <a:r>
-              <a:rPr lang="en-US" sz="1700" b="1" dirty="0">
-                <a:solidFill>
-                  <a:srgbClr val="0B1F3A"/>
-                </a:solidFill>
-                <a:latin typeface="Calibri" pitchFamily="34" charset="0"/>
-                <a:ea typeface="Calibri" pitchFamily="34" charset="-122"/>
-                <a:cs typeface="Calibri" pitchFamily="34" charset="-120"/>
-              </a:rPr>
-              <a:t>Detection Broke on Rotation</a:t>
-            </a:r>
-            <a:endParaRPr lang="en-US" sz="1700" dirty="0"/>
-          </a:p>
-        </p:txBody>
-      </p:sp>
-      <p:sp>
-        <p:nvSpPr>
-          <p:cNvPr id="24" name="Text 22"/>
-          <p:cNvSpPr/>
-          <p:nvPr/>
-        </p:nvSpPr>
-        <p:spPr>
-          <a:xfrm>
-            <a:off x="6492240" y="4663440"/>
-            <a:ext cx="5074920" cy="640080"/>
-          </a:xfrm>
-          <a:prstGeom prst="rect">
-            <a:avLst/>
-          </a:prstGeom>
-          <a:noFill/>
-          <a:ln/>
-        </p:spPr>
-        <p:txBody>
-          <a:bodyPr wrap="square" lIns="0" tIns="0" rIns="0" bIns="0" rtlCol="0" anchor="ctr"/>
-          <a:lstStyle/>
-          <a:p>
-            <a:pPr marL="0" indent="0">
-              <a:buNone/>
-            </a:pPr>
-            <a:r>
-              <a:rPr lang="en-US" sz="1000" b="1" kern="0" spc="200" dirty="0">
-                <a:solidFill>
-                  <a:srgbClr val="00D4A8"/>
-                </a:solidFill>
-                <a:latin typeface="Calibri" pitchFamily="34" charset="0"/>
-                <a:ea typeface="Calibri" pitchFamily="34" charset="-122"/>
-                <a:cs typeface="Calibri" pitchFamily="34" charset="-120"/>
-              </a:rPr>
-              <a:t>CAUSE  </a:t>
-            </a:r>
-            <a:r>
-              <a:rPr lang="en-US" sz="1200" dirty="0">
-                <a:solidFill>
-                  <a:srgbClr val="6B7C93"/>
-                </a:solidFill>
-                <a:latin typeface="Calibri" pitchFamily="34" charset="0"/>
-                <a:ea typeface="Calibri" pitchFamily="34" charset="-122"/>
-                <a:cs typeface="Calibri" pitchFamily="34" charset="-120"/>
-              </a:rPr>
-              <a:t>Phone tilted physically — model saw upright frame of sideways world.</a:t>
-            </a:r>
-            <a:endParaRPr lang="en-US" sz="1000" dirty="0"/>
-          </a:p>
-        </p:txBody>
-      </p:sp>
-      <p:sp>
-        <p:nvSpPr>
           <p:cNvPr id="25" name="Text 23"/>
           <p:cNvSpPr/>
           <p:nvPr/>
         </p:nvSpPr>
         <p:spPr>
           <a:xfrm>
-            <a:off x="6492240" y="5349240"/>
+            <a:off x="822960" y="5486400"/>
             <a:ext cx="5074920" cy="640080"/>
           </a:xfrm>
           <a:prstGeom prst="rect">
@@ -4116,96 +3927,7 @@
             <a:pPr marL="0" indent="0">
               <a:buNone/>
             </a:pPr>
-            <a:r>
-              <a:rPr lang="en-US" sz="1600" b="1" dirty="0">
-                <a:solidFill>
-                  <a:srgbClr val="C04040"/>
-                </a:solidFill>
-                <a:latin typeface="Calibri" pitchFamily="34" charset="0"/>
-                <a:ea typeface="Calibri" pitchFamily="34" charset="-122"/>
-                <a:cs typeface="Calibri" pitchFamily="34" charset="-120"/>
-              </a:rPr>
-              <a:t>—</a:t>
-            </a:r>
             <a:endParaRPr lang="en-US" sz="1600" dirty="0"/>
-          </a:p>
-        </p:txBody>
-      </p:sp>
-      <p:sp>
-        <p:nvSpPr>
-          <p:cNvPr id="21" name="Text 19"/>
-          <p:cNvSpPr/>
-          <p:nvPr/>
-        </p:nvSpPr>
-        <p:spPr>
-          <a:xfrm>
-            <a:off x="822960" y="5577840"/>
-            <a:ext cx="5029200" cy="274320"/>
-          </a:xfrm>
-          <a:prstGeom prst="rect">
-            <a:avLst/>
-          </a:prstGeom>
-          <a:noFill/>
-          <a:ln/>
-        </p:spPr>
-        <p:txBody>
-          <a:bodyPr wrap="square" lIns="0" tIns="0" rIns="0" bIns="0" rtlCol="0" anchor="ctr"/>
-          <a:lstStyle/>
-          <a:p>
-            <a:pPr marL="0" indent="0">
-              <a:buNone/>
-            </a:pPr>
-            <a:r>
-              <a:rPr lang="en-US" sz="1300" b="1" dirty="0">
-                <a:solidFill>
-                  <a:srgbClr val="0B1F3A"/>
-                </a:solidFill>
-                <a:latin typeface="Calibri" pitchFamily="34" charset="0"/>
-                <a:ea typeface="Calibri" pitchFamily="34" charset="-122"/>
-                <a:cs typeface="Calibri" pitchFamily="34" charset="-120"/>
-              </a:rPr>
-              <a:t>No Memory Across Frames</a:t>
-            </a:r>
-            <a:endParaRPr lang="en-US" sz="1300" dirty="0"/>
-          </a:p>
-        </p:txBody>
-      </p:sp>
-      <p:sp>
-        <p:nvSpPr>
-          <p:cNvPr id="22" name="Text 20"/>
-          <p:cNvSpPr/>
-          <p:nvPr/>
-        </p:nvSpPr>
-        <p:spPr>
-          <a:xfrm>
-            <a:off x="822960" y="5833872"/>
-            <a:ext cx="5029200" cy="502920"/>
-          </a:xfrm>
-          <a:prstGeom prst="rect">
-            <a:avLst/>
-          </a:prstGeom>
-          <a:noFill/>
-          <a:ln/>
-        </p:spPr>
-        <p:txBody>
-          <a:bodyPr wrap="square" lIns="0" tIns="0" rIns="0" bIns="0" rtlCol="0" anchor="ctr"/>
-          <a:lstStyle/>
-          <a:p>
-            <a:pPr marL="0" indent="0">
-              <a:buNone/>
-            </a:pPr>
-            <a:r>
-              <a:rPr lang="en-US" sz="1100" dirty="0">
-                <a:solidFill>
-                  <a:srgbClr val="6B7C93"/>
-                </a:solidFill>
-                <a:latin typeface="Calibri" pitchFamily="34" charset="0"/>
-                <a:ea typeface="Calibri" pitchFamily="34" charset="-122"/>
-                <a:cs typeface="Calibri" pitchFamily="34" charset="-120"/>
-              </a:rPr>
-              <a:t>Same object detected as new each frame — no temporal tracking.</a:t>
-            </a:r>
-            <a:endParaRPr lang="en-US" sz="1100" dirty="0"/>
           </a:p>
         </p:txBody>
       </p:sp>
@@ -4734,123 +4456,6 @@
                 <a:cs typeface="Calibri" pitchFamily="34" charset="-120"/>
               </a:rPr>
               <a:t>Urdu, Hindi, Arabic — configurable in app settings.</a:t>
-            </a:r>
-            <a:endParaRPr lang="en-US" sz="1100" dirty="0"/>
-          </a:p>
-        </p:txBody>
-      </p:sp>
-      <p:sp>
-        <p:nvSpPr>
-          <p:cNvPr id="37" name="Text 35"/>
-          <p:cNvSpPr/>
-          <p:nvPr/>
-        </p:nvSpPr>
-        <p:spPr>
-          <a:xfrm>
-            <a:off x="6400800" y="5577840"/>
-            <a:ext cx="274320" cy="274320"/>
-          </a:xfrm>
-          <a:prstGeom prst="rect">
-            <a:avLst/>
-          </a:prstGeom>
-          <a:noFill/>
-          <a:ln/>
-        </p:spPr>
-        <p:txBody>
-          <a:bodyPr wrap="square" lIns="0" tIns="0" rIns="0" bIns="0" rtlCol="0" anchor="ctr"/>
-          <a:lstStyle/>
-          <a:p>
-            <a:pPr marL="0" indent="0">
-              <a:buNone/>
-            </a:pPr>
-            <a:r>
-              <a:rPr lang="en-US" sz="1600" b="1" dirty="0">
-                <a:solidFill>
-                  <a:srgbClr val="2E8B57"/>
-                </a:solidFill>
-                <a:latin typeface="Calibri" pitchFamily="34" charset="0"/>
-                <a:ea typeface="Calibri" pitchFamily="34" charset="-122"/>
-                <a:cs typeface="Calibri" pitchFamily="34" charset="-120"/>
-              </a:rPr>
-              <a:t>+</a:t>
-            </a:r>
-            <a:endParaRPr lang="en-US" sz="1600" dirty="0"/>
-          </a:p>
-        </p:txBody>
-      </p:sp>
-      <p:sp>
-        <p:nvSpPr>
-          <p:cNvPr id="38" name="Text 36"/>
-          <p:cNvSpPr/>
-          <p:nvPr/>
-        </p:nvSpPr>
-        <p:spPr>
-          <a:xfrm>
-            <a:off x="6675120" y="5577840"/>
-            <a:ext cx="5029200" cy="274320"/>
-          </a:xfrm>
-          <a:prstGeom prst="rect">
-            <a:avLst/>
-          </a:prstGeom>
-          <a:noFill/>
-          <a:ln/>
-        </p:spPr>
-        <p:txBody>
-          <a:bodyPr wrap="square" lIns="0" tIns="0" rIns="0" bIns="0" rtlCol="0" anchor="ctr"/>
-          <a:lstStyle/>
-          <a:p>
-            <a:pPr marL="0" indent="0">
-              <a:buNone/>
-            </a:pPr>
-            <a:r>
-              <a:rPr lang="en-US" sz="1300" b="1" dirty="0">
-                <a:solidFill>
-                  <a:srgbClr val="0B1F3A"/>
-                </a:solidFill>
-                <a:latin typeface="Calibri" pitchFamily="34" charset="0"/>
-                <a:ea typeface="Calibri" pitchFamily="34" charset="-122"/>
-                <a:cs typeface="Calibri" pitchFamily="34" charset="-120"/>
-              </a:rPr>
-              <a:t>Object Tracking</a:t>
-            </a:r>
-            <a:endParaRPr lang="en-US" sz="1300" dirty="0"/>
-          </a:p>
-        </p:txBody>
-      </p:sp>
-      <p:sp>
-        <p:nvSpPr>
-          <p:cNvPr id="39" name="Text 37"/>
-          <p:cNvSpPr/>
-          <p:nvPr/>
-        </p:nvSpPr>
-        <p:spPr>
-          <a:xfrm>
-            <a:off x="6675120" y="5833872"/>
-            <a:ext cx="5029200" cy="502920"/>
-          </a:xfrm>
-          <a:prstGeom prst="rect">
-            <a:avLst/>
-          </a:prstGeom>
-          <a:noFill/>
-          <a:ln/>
-        </p:spPr>
-        <p:txBody>
-          <a:bodyPr wrap="square" lIns="0" tIns="0" rIns="0" bIns="0" rtlCol="0" anchor="ctr"/>
-          <a:lstStyle/>
-          <a:p>
-            <a:pPr marL="0" indent="0">
-              <a:buNone/>
-            </a:pPr>
-            <a:r>
-              <a:rPr lang="en-US" sz="1100" dirty="0">
-                <a:solidFill>
-                  <a:srgbClr val="6B7C93"/>
-                </a:solidFill>
-                <a:latin typeface="Calibri" pitchFamily="34" charset="0"/>
-                <a:ea typeface="Calibri" pitchFamily="34" charset="-122"/>
-                <a:cs typeface="Calibri" pitchFamily="34" charset="-120"/>
-              </a:rPr>
-              <a:t>Persistent IDs across frames to reduce repeated announcements.</a:t>
             </a:r>
             <a:endParaRPr lang="en-US" sz="1100" dirty="0"/>
           </a:p>
@@ -7522,7 +7127,40 @@
                 <a:ea typeface="Calibri" pitchFamily="34" charset="-122"/>
                 <a:cs typeface="Calibri" pitchFamily="34" charset="-120"/>
               </a:rPr>
-              <a:t>What is NAVISENCE?</a:t>
+              <a:t>What </a:t>
+            </a:r>
+            <a:r>
+              <a:rPr lang="en-US" sz="3200" b="1">
+                <a:solidFill>
+                  <a:srgbClr val="0B1F3A"/>
+                </a:solidFill>
+                <a:latin typeface="Calibri" pitchFamily="34" charset="0"/>
+                <a:ea typeface="Calibri" pitchFamily="34" charset="-122"/>
+                <a:cs typeface="Calibri" pitchFamily="34" charset="-120"/>
+              </a:rPr>
+              <a:t>is </a:t>
+            </a:r>
+            <a:r>
+              <a:rPr lang="en-US" sz="3200" b="1" smtClean="0">
+                <a:solidFill>
+                  <a:srgbClr val="0B1F3A"/>
+                </a:solidFill>
+                <a:latin typeface="Calibri" pitchFamily="34" charset="0"/>
+                <a:ea typeface="Calibri" pitchFamily="34" charset="-122"/>
+                <a:cs typeface="Calibri" pitchFamily="34" charset="-120"/>
+              </a:rPr>
+              <a:t>NAVISENSE</a:t>
+            </a:r>
+            <a:r>
+              <a:rPr lang="en-US" sz="3200" b="1" dirty="0">
+                <a:solidFill>
+                  <a:srgbClr val="0B1F3A"/>
+                </a:solidFill>
+                <a:latin typeface="Calibri" pitchFamily="34" charset="0"/>
+                <a:ea typeface="Calibri" pitchFamily="34" charset="-122"/>
+                <a:cs typeface="Calibri" pitchFamily="34" charset="-120"/>
+              </a:rPr>
+              <a:t>?</a:t>
             </a:r>
             <a:endParaRPr lang="en-US" sz="3200" dirty="0"/>
           </a:p>
@@ -12672,7 +12310,7 @@
               <a:buNone/>
             </a:pPr>
             <a:r>
-              <a:rPr lang="en-US" sz="1200" i="1" dirty="0">
+              <a:rPr lang="en-US" sz="1200" i="1" dirty="0" smtClean="0">
                 <a:solidFill>
                   <a:srgbClr val="7CC4B0"/>
                 </a:solidFill>
@@ -13128,6 +12766,128 @@
               <a:t>9 / 13</a:t>
             </a:r>
             <a:endParaRPr lang="en-US" sz="1000" dirty="0"/>
+          </a:p>
+        </p:txBody>
+      </p:sp>
+      <p:sp>
+        <p:nvSpPr>
+          <p:cNvPr id="21" name="Shape 4"/>
+          <p:cNvSpPr/>
+          <p:nvPr/>
+        </p:nvSpPr>
+        <p:spPr>
+          <a:xfrm>
+            <a:off x="548640" y="3931920"/>
+            <a:ext cx="2697480" cy="1828800"/>
+          </a:xfrm>
+          <a:prstGeom prst="rect">
+            <a:avLst/>
+          </a:prstGeom>
+          <a:solidFill>
+            <a:srgbClr val="0B1F3A"/>
+          </a:solidFill>
+          <a:ln w="12700">
+            <a:solidFill>
+              <a:srgbClr val="0B1F3A"/>
+            </a:solidFill>
+            <a:prstDash val="solid"/>
+          </a:ln>
+        </p:spPr>
+      </p:sp>
+      <p:sp>
+        <p:nvSpPr>
+          <p:cNvPr id="22" name="Rectangle 21"/>
+          <p:cNvSpPr/>
+          <p:nvPr/>
+        </p:nvSpPr>
+        <p:spPr>
+          <a:xfrm>
+            <a:off x="1069827" y="4061460"/>
+            <a:ext cx="1574313" cy="1107996"/>
+          </a:xfrm>
+          <a:prstGeom prst="rect">
+            <a:avLst/>
+          </a:prstGeom>
+        </p:spPr>
+        <p:txBody>
+          <a:bodyPr wrap="square">
+            <a:spAutoFit/>
+          </a:bodyPr>
+          <a:lstStyle/>
+          <a:p>
+            <a:pPr algn="ctr"/>
+            <a:r>
+              <a:rPr lang="en-US" b="1" dirty="0" smtClean="0">
+                <a:solidFill>
+                  <a:srgbClr val="00D4A8"/>
+                </a:solidFill>
+                <a:latin typeface="Calibri" pitchFamily="34" charset="0"/>
+                <a:ea typeface="Calibri" pitchFamily="34" charset="-122"/>
+                <a:cs typeface="Calibri" pitchFamily="34" charset="-120"/>
+              </a:rPr>
+              <a:t>~</a:t>
+            </a:r>
+            <a:r>
+              <a:rPr lang="en-US" sz="6600" b="1" dirty="0" smtClean="0">
+                <a:solidFill>
+                  <a:srgbClr val="00D4A8"/>
+                </a:solidFill>
+                <a:latin typeface="Calibri" pitchFamily="34" charset="0"/>
+                <a:ea typeface="Calibri" pitchFamily="34" charset="-122"/>
+                <a:cs typeface="Calibri" pitchFamily="34" charset="-120"/>
+              </a:rPr>
+              <a:t>1</a:t>
+            </a:r>
+            <a:r>
+              <a:rPr lang="en-US" sz="3200" b="1" dirty="0" smtClean="0">
+                <a:solidFill>
+                  <a:srgbClr val="FFFFFF"/>
+                </a:solidFill>
+                <a:latin typeface="Calibri" pitchFamily="34" charset="0"/>
+                <a:ea typeface="Calibri" pitchFamily="34" charset="-122"/>
+                <a:cs typeface="Calibri" pitchFamily="34" charset="-120"/>
+              </a:rPr>
+              <a:t>s</a:t>
+            </a:r>
+            <a:endParaRPr lang="en-US" sz="3200" dirty="0"/>
+          </a:p>
+        </p:txBody>
+      </p:sp>
+      <p:sp>
+        <p:nvSpPr>
+          <p:cNvPr id="23" name="Text 6"/>
+          <p:cNvSpPr/>
+          <p:nvPr/>
+        </p:nvSpPr>
+        <p:spPr>
+          <a:xfrm>
+            <a:off x="685800" y="5169456"/>
+            <a:ext cx="2423160" cy="457200"/>
+          </a:xfrm>
+          <a:prstGeom prst="rect">
+            <a:avLst/>
+          </a:prstGeom>
+          <a:noFill/>
+          <a:ln/>
+        </p:spPr>
+        <p:txBody>
+          <a:bodyPr wrap="square" lIns="0" tIns="0" rIns="0" bIns="0" rtlCol="0" anchor="ctr"/>
+          <a:lstStyle/>
+          <a:p>
+            <a:pPr marL="0" indent="0" algn="ctr">
+              <a:buNone/>
+            </a:pPr>
+            <a:r>
+              <a:rPr lang="en-US" sz="1200" i="1" dirty="0" smtClean="0">
+                <a:solidFill>
+                  <a:srgbClr val="7CC4B0"/>
+                </a:solidFill>
+                <a:latin typeface="Calibri" pitchFamily="34" charset="0"/>
+                <a:cs typeface="Calibri" pitchFamily="34" charset="-120"/>
+              </a:rPr>
+              <a:t>App Latency</a:t>
+            </a:r>
+            <a:endParaRPr lang="en-US" sz="1200" dirty="0"/>
           </a:p>
         </p:txBody>
       </p:sp>
@@ -15275,7 +15035,7 @@
               <a:buNone/>
             </a:pPr>
             <a:r>
-              <a:rPr lang="en-US" sz="1300" b="1" dirty="0">
+              <a:rPr lang="en-US" sz="1300" b="1" dirty="0" smtClean="0">
                 <a:solidFill>
                   <a:srgbClr val="081428"/>
                 </a:solidFill>
@@ -15283,7 +15043,7 @@
                 <a:ea typeface="Calibri" pitchFamily="34" charset="-122"/>
                 <a:cs typeface="Calibri" pitchFamily="34" charset="-120"/>
               </a:rPr>
-              <a:t>NAVISENCE</a:t>
+              <a:t>NAVISENSE</a:t>
             </a:r>
             <a:endParaRPr lang="en-US" sz="1300" dirty="0"/>
           </a:p>
@@ -15984,7 +15744,7 @@
   <a:extraClrSchemeLst/>
   <a:extLst>
     <a:ext uri="{05A4C25C-085E-4340-85A3-A5531E510DB2}">
-      <thm15:themeFamily xmlns:thm15="http://schemas.microsoft.com/office/thememl/2012/main" xmlns="" name="Office Theme" id="{62F939B6-93AF-4DB8-9C6B-D6C7DFDC589F}" vid="{4A3C46E8-61CC-4603-A589-7422A47A8E4A}"/>
+      <thm15:themeFamily xmlns="" xmlns:thm15="http://schemas.microsoft.com/office/thememl/2012/main" name="Office Theme" id="{62F939B6-93AF-4DB8-9C6B-D6C7DFDC589F}" vid="{4A3C46E8-61CC-4603-A589-7422A47A8E4A}"/>
     </a:ext>
   </a:extLst>
 </a:theme>
